--- a/Attack/Adversarial_Attack/NLP/论文作图.pptx
+++ b/Attack/Adversarial_Attack/NLP/论文作图.pptx
@@ -8,10 +8,11 @@
     <p:notesMasterId r:id="rId4"/>
   </p:notesMasterIdLst>
   <p:handoutMasterIdLst>
-    <p:handoutMasterId r:id="rId5"/>
+    <p:handoutMasterId r:id="rId6"/>
   </p:handoutMasterIdLst>
   <p:sldIdLst>
     <p:sldId id="256" r:id="rId3"/>
+    <p:sldId id="257" r:id="rId5"/>
   </p:sldIdLst>
   <p:sldSz cx="12192000" cy="6858000"/>
   <p:notesSz cx="7103745" cy="10234295"/>
@@ -3531,7 +3532,13 @@
           <a:bodyPr/>
           <a:lstStyle/>
           <a:p>
-            <a:endParaRPr lang="zh-CN" altLang="en-US" dirty="0">
+            <a:r>
+              <a:rPr lang="en-US" altLang="zh-CN" dirty="0">
+                <a:effectLst/>
+              </a:rPr>
+              <a:t>BERT-Attack</a:t>
+            </a:r>
+            <a:endParaRPr lang="en-US" altLang="zh-CN" dirty="0">
               <a:effectLst/>
             </a:endParaRPr>
           </a:p>
@@ -3564,6 +3571,567 @@
     <a:masterClrMapping/>
   </p:clrMapOvr>
 </p:sld>
+</file>
+
+<file path=ppt/slides/slide2.xml><?xml version="1.0" encoding="utf-8"?>
+<p:sld xmlns:a="http://schemas.openxmlformats.org/drawingml/2006/main" xmlns:r="http://schemas.openxmlformats.org/officeDocument/2006/relationships" xmlns:p="http://schemas.openxmlformats.org/presentationml/2006/main">
+  <p:cSld>
+    <p:spTree>
+      <p:nvGrpSpPr>
+        <p:cNvPr id="1" name=""/>
+        <p:cNvGrpSpPr/>
+        <p:nvPr/>
+      </p:nvGrpSpPr>
+      <p:grpSpPr/>
+      <p:pic>
+        <p:nvPicPr>
+          <p:cNvPr id="4" name="图片 3"/>
+          <p:cNvPicPr>
+            <a:picLocks noChangeAspect="1"/>
+          </p:cNvPicPr>
+          <p:nvPr>
+            <p:custDataLst>
+              <p:tags r:id="rId1"/>
+            </p:custDataLst>
+          </p:nvPr>
+        </p:nvPicPr>
+        <p:blipFill>
+          <a:blip r:embed="rId2"/>
+          <a:stretch>
+            <a:fillRect/>
+          </a:stretch>
+        </p:blipFill>
+        <p:spPr>
+          <a:xfrm>
+            <a:off x="-17780" y="82550"/>
+            <a:ext cx="4262755" cy="3084195"/>
+          </a:xfrm>
+          <a:prstGeom prst="rect">
+            <a:avLst/>
+          </a:prstGeom>
+        </p:spPr>
+      </p:pic>
+      <p:pic>
+        <p:nvPicPr>
+          <p:cNvPr id="5" name="图片 4"/>
+          <p:cNvPicPr>
+            <a:picLocks noChangeAspect="1"/>
+          </p:cNvPicPr>
+          <p:nvPr>
+            <p:custDataLst>
+              <p:tags r:id="rId3"/>
+            </p:custDataLst>
+          </p:nvPr>
+        </p:nvPicPr>
+        <p:blipFill>
+          <a:blip r:embed="rId4"/>
+          <a:stretch>
+            <a:fillRect/>
+          </a:stretch>
+        </p:blipFill>
+        <p:spPr>
+          <a:xfrm>
+            <a:off x="5490210" y="0"/>
+            <a:ext cx="6610985" cy="6858000"/>
+          </a:xfrm>
+          <a:prstGeom prst="rect">
+            <a:avLst/>
+          </a:prstGeom>
+        </p:spPr>
+      </p:pic>
+      <p:sp>
+        <p:nvSpPr>
+          <p:cNvPr id="11" name="文本框 10"/>
+          <p:cNvSpPr txBox="1"/>
+          <p:nvPr>
+            <p:custDataLst>
+              <p:tags r:id="rId5"/>
+            </p:custDataLst>
+          </p:nvPr>
+        </p:nvSpPr>
+        <p:spPr>
+          <a:xfrm>
+            <a:off x="-635" y="3429000"/>
+            <a:ext cx="5491480" cy="3199765"/>
+          </a:xfrm>
+          <a:prstGeom prst="rect">
+            <a:avLst/>
+          </a:prstGeom>
+          <a:noFill/>
+        </p:spPr>
+        <p:txBody>
+          <a:bodyPr wrap="square" rtlCol="0">
+            <a:noAutofit/>
+          </a:bodyPr>
+          <a:p>
+            <a:pPr algn="l"/>
+            <a:r>
+              <a:rPr lang="en-US" altLang="zh-CN" sz="1200" b="1">
+                <a:latin typeface="微软雅黑" charset="0"/>
+                <a:ea typeface="微软雅黑" charset="0"/>
+                <a:cs typeface="微软雅黑" charset="0"/>
+              </a:rPr>
+              <a:t>================</a:t>
+            </a:r>
+            <a:r>
+              <a:rPr lang="zh-CN" altLang="en-US" sz="1200" b="1">
+                <a:latin typeface="微软雅黑" charset="0"/>
+                <a:ea typeface="微软雅黑" charset="0"/>
+                <a:cs typeface="微软雅黑" charset="0"/>
+              </a:rPr>
+              <a:t>选词阶段</a:t>
+            </a:r>
+            <a:r>
+              <a:rPr lang="en-US" altLang="zh-CN" sz="1200" b="1">
+                <a:latin typeface="微软雅黑" charset="0"/>
+                <a:ea typeface="微软雅黑" charset="0"/>
+                <a:cs typeface="微软雅黑" charset="0"/>
+              </a:rPr>
+              <a:t>==================</a:t>
+            </a:r>
+            <a:endParaRPr lang="en-US" altLang="zh-CN" sz="1200" b="1">
+              <a:latin typeface="微软雅黑" charset="0"/>
+              <a:ea typeface="微软雅黑" charset="0"/>
+              <a:cs typeface="微软雅黑" charset="0"/>
+            </a:endParaRPr>
+          </a:p>
+          <a:p>
+            <a:pPr algn="l"/>
+            <a:r>
+              <a:rPr lang="en-US" altLang="zh-CN" sz="1200" b="1">
+                <a:latin typeface="微软雅黑" charset="0"/>
+                <a:ea typeface="微软雅黑" charset="0"/>
+                <a:cs typeface="微软雅黑" charset="0"/>
+              </a:rPr>
+              <a:t>2. S</a:t>
+            </a:r>
+            <a:r>
+              <a:rPr lang="zh-CN" altLang="en-US" sz="1200" b="1">
+                <a:latin typeface="微软雅黑" charset="0"/>
+                <a:ea typeface="微软雅黑" charset="0"/>
+                <a:cs typeface="微软雅黑" charset="0"/>
+              </a:rPr>
+              <a:t>输入并分词后的句子</a:t>
+            </a:r>
+            <a:r>
+              <a:rPr lang="zh-CN" altLang="en-US" sz="1200" b="1">
+                <a:latin typeface="微软雅黑" charset="0"/>
+                <a:ea typeface="微软雅黑" charset="0"/>
+                <a:cs typeface="微软雅黑" charset="0"/>
+              </a:rPr>
+              <a:t>序列</a:t>
+            </a:r>
+            <a:endParaRPr lang="zh-CN" altLang="en-US" sz="1200" b="1">
+              <a:latin typeface="微软雅黑" charset="0"/>
+              <a:ea typeface="微软雅黑" charset="0"/>
+              <a:cs typeface="微软雅黑" charset="0"/>
+            </a:endParaRPr>
+          </a:p>
+          <a:p>
+            <a:pPr algn="l"/>
+            <a:r>
+              <a:rPr lang="en-US" altLang="zh-CN" sz="1200" b="1">
+                <a:latin typeface="微软雅黑" charset="0"/>
+                <a:ea typeface="微软雅黑" charset="0"/>
+                <a:cs typeface="微软雅黑" charset="0"/>
+              </a:rPr>
+              <a:t>3. </a:t>
+            </a:r>
+            <a:r>
+              <a:rPr lang="zh-CN" altLang="en-US" sz="1200" b="1">
+                <a:latin typeface="微软雅黑" charset="0"/>
+                <a:ea typeface="微软雅黑" charset="0"/>
+                <a:cs typeface="微软雅黑" charset="0"/>
+              </a:rPr>
+              <a:t>句子原本的正确标签</a:t>
+            </a:r>
+            <a:r>
+              <a:rPr lang="en-US" altLang="zh-CN" sz="1200" b="1">
+                <a:latin typeface="微软雅黑" charset="0"/>
+                <a:ea typeface="微软雅黑" charset="0"/>
+                <a:cs typeface="微软雅黑" charset="0"/>
+              </a:rPr>
+              <a:t>(Eg.posotive)</a:t>
+            </a:r>
+            <a:endParaRPr lang="en-US" altLang="zh-CN" sz="1200" b="1">
+              <a:latin typeface="微软雅黑" charset="0"/>
+              <a:ea typeface="微软雅黑" charset="0"/>
+              <a:cs typeface="微软雅黑" charset="0"/>
+            </a:endParaRPr>
+          </a:p>
+          <a:p>
+            <a:pPr algn="l"/>
+            <a:r>
+              <a:rPr lang="en-US" altLang="zh-CN" sz="1200" b="1">
+                <a:latin typeface="微软雅黑" charset="0"/>
+                <a:ea typeface="微软雅黑" charset="0"/>
+                <a:cs typeface="微软雅黑" charset="0"/>
+              </a:rPr>
+              <a:t>4~5. MASK</a:t>
+            </a:r>
+            <a:r>
+              <a:rPr lang="zh-CN" altLang="en-US" sz="1200" b="1">
+                <a:latin typeface="微软雅黑" charset="0"/>
+                <a:ea typeface="微软雅黑" charset="0"/>
+                <a:cs typeface="微软雅黑" charset="0"/>
+              </a:rPr>
+              <a:t>每一个词，判断对模型输出的</a:t>
+            </a:r>
+            <a:r>
+              <a:rPr lang="en-US" altLang="zh-CN" sz="1200" b="1">
+                <a:latin typeface="微软雅黑" charset="0"/>
+                <a:ea typeface="微软雅黑" charset="0"/>
+                <a:cs typeface="微软雅黑" charset="0"/>
+              </a:rPr>
+              <a:t>logits</a:t>
+            </a:r>
+            <a:r>
+              <a:rPr lang="zh-CN" altLang="en-US" sz="1200" b="1">
+                <a:latin typeface="微软雅黑" charset="0"/>
+                <a:ea typeface="微软雅黑" charset="0"/>
+                <a:cs typeface="微软雅黑" charset="0"/>
+              </a:rPr>
+              <a:t>影响</a:t>
+            </a:r>
+            <a:endParaRPr lang="zh-CN" altLang="en-US" sz="1200" b="1">
+              <a:latin typeface="微软雅黑" charset="0"/>
+              <a:ea typeface="微软雅黑" charset="0"/>
+              <a:cs typeface="微软雅黑" charset="0"/>
+            </a:endParaRPr>
+          </a:p>
+          <a:p>
+            <a:pPr algn="l"/>
+            <a:r>
+              <a:rPr lang="zh-CN" altLang="en-US" sz="1200" b="1">
+                <a:latin typeface="微软雅黑" charset="0"/>
+                <a:ea typeface="微软雅黑" charset="0"/>
+                <a:cs typeface="微软雅黑" charset="0"/>
+              </a:rPr>
+              <a:t> </a:t>
+            </a:r>
+            <a:r>
+              <a:rPr lang="en-US" altLang="zh-CN" sz="1200" b="1">
+                <a:latin typeface="微软雅黑" charset="0"/>
+                <a:ea typeface="微软雅黑" charset="0"/>
+                <a:cs typeface="微软雅黑" charset="0"/>
+              </a:rPr>
+              <a:t>       </a:t>
+            </a:r>
+            <a:r>
+              <a:rPr lang="zh-CN" altLang="en-US" sz="1200" b="1">
+                <a:latin typeface="微软雅黑" charset="0"/>
+                <a:ea typeface="微软雅黑" charset="0"/>
+                <a:cs typeface="微软雅黑" charset="0"/>
+              </a:rPr>
+              <a:t>并根据重要度</a:t>
+            </a:r>
+            <a:r>
+              <a:rPr lang="zh-CN" altLang="en-US" sz="1200" b="1">
+                <a:latin typeface="微软雅黑" charset="0"/>
+                <a:ea typeface="微软雅黑" charset="0"/>
+                <a:cs typeface="微软雅黑" charset="0"/>
+              </a:rPr>
+              <a:t>排序</a:t>
+            </a:r>
+            <a:endParaRPr lang="zh-CN" altLang="en-US" sz="1200" b="1">
+              <a:latin typeface="微软雅黑" charset="0"/>
+              <a:ea typeface="微软雅黑" charset="0"/>
+              <a:cs typeface="微软雅黑" charset="0"/>
+            </a:endParaRPr>
+          </a:p>
+          <a:p>
+            <a:pPr algn="l"/>
+            <a:r>
+              <a:rPr lang="en-US" altLang="zh-CN" sz="1200" b="1">
+                <a:latin typeface="微软雅黑" charset="0"/>
+                <a:ea typeface="微软雅黑" charset="0"/>
+                <a:cs typeface="微软雅黑" charset="0"/>
+                <a:sym typeface="+mn-ea"/>
+              </a:rPr>
+              <a:t>================</a:t>
+            </a:r>
+            <a:r>
+              <a:rPr lang="zh-CN" altLang="en-US" sz="1200" b="1">
+                <a:latin typeface="微软雅黑" charset="0"/>
+                <a:ea typeface="微软雅黑" charset="0"/>
+                <a:cs typeface="微软雅黑" charset="0"/>
+                <a:sym typeface="+mn-ea"/>
+              </a:rPr>
+              <a:t>换词阶段</a:t>
+            </a:r>
+            <a:r>
+              <a:rPr lang="en-US" altLang="zh-CN" sz="1200" b="1">
+                <a:latin typeface="微软雅黑" charset="0"/>
+                <a:ea typeface="微软雅黑" charset="0"/>
+                <a:cs typeface="微软雅黑" charset="0"/>
+                <a:sym typeface="+mn-ea"/>
+              </a:rPr>
+              <a:t>==================</a:t>
+            </a:r>
+            <a:endParaRPr lang="en-US" altLang="zh-CN" sz="1200" b="1">
+              <a:latin typeface="微软雅黑" charset="0"/>
+              <a:ea typeface="微软雅黑" charset="0"/>
+              <a:cs typeface="微软雅黑" charset="0"/>
+            </a:endParaRPr>
+          </a:p>
+          <a:p>
+            <a:pPr algn="l"/>
+            <a:r>
+              <a:rPr lang="en-US" altLang="zh-CN" sz="1200" b="1">
+                <a:latin typeface="微软雅黑" charset="0"/>
+                <a:ea typeface="微软雅黑" charset="0"/>
+                <a:cs typeface="微软雅黑" charset="0"/>
+              </a:rPr>
+              <a:t>8~18</a:t>
+            </a:r>
+            <a:endParaRPr lang="en-US" altLang="zh-CN" sz="1200" b="1">
+              <a:latin typeface="微软雅黑" charset="0"/>
+              <a:ea typeface="微软雅黑" charset="0"/>
+              <a:cs typeface="微软雅黑" charset="0"/>
+            </a:endParaRPr>
+          </a:p>
+          <a:p>
+            <a:pPr indent="457200" algn="l"/>
+            <a:r>
+              <a:rPr lang="zh-CN" altLang="en-US" sz="1200" b="1">
+                <a:latin typeface="微软雅黑" charset="0"/>
+                <a:ea typeface="微软雅黑" charset="0"/>
+                <a:cs typeface="微软雅黑" charset="0"/>
+              </a:rPr>
+              <a:t>如果是完整</a:t>
+            </a:r>
+            <a:r>
+              <a:rPr lang="zh-CN" altLang="en-US" sz="1200" b="1">
+                <a:latin typeface="微软雅黑" charset="0"/>
+                <a:ea typeface="微软雅黑" charset="0"/>
+                <a:cs typeface="微软雅黑" charset="0"/>
+              </a:rPr>
+              <a:t>词</a:t>
+            </a:r>
+            <a:endParaRPr lang="zh-CN" altLang="en-US" sz="1200" b="1">
+              <a:latin typeface="微软雅黑" charset="0"/>
+              <a:ea typeface="微软雅黑" charset="0"/>
+              <a:cs typeface="微软雅黑" charset="0"/>
+            </a:endParaRPr>
+          </a:p>
+          <a:p>
+            <a:pPr marL="457200" lvl="1" indent="457200" algn="l"/>
+            <a:r>
+              <a:rPr lang="zh-CN" altLang="en-US" sz="1200" b="1">
+                <a:latin typeface="微软雅黑" charset="0"/>
+                <a:ea typeface="微软雅黑" charset="0"/>
+                <a:cs typeface="微软雅黑" charset="0"/>
+              </a:rPr>
+              <a:t>用</a:t>
+            </a:r>
+            <a:r>
+              <a:rPr lang="en-US" altLang="zh-CN" sz="1200" b="1">
+                <a:latin typeface="微软雅黑" charset="0"/>
+                <a:ea typeface="微软雅黑" charset="0"/>
+                <a:cs typeface="微软雅黑" charset="0"/>
+              </a:rPr>
+              <a:t>BERT</a:t>
+            </a:r>
+            <a:r>
+              <a:rPr lang="zh-CN" altLang="en-US" sz="1200" b="1">
+                <a:latin typeface="微软雅黑" charset="0"/>
+                <a:ea typeface="微软雅黑" charset="0"/>
+                <a:cs typeface="微软雅黑" charset="0"/>
+              </a:rPr>
+              <a:t>预测每个词的</a:t>
+            </a:r>
+            <a:r>
+              <a:rPr lang="en-US" altLang="zh-CN" sz="1200" b="1">
+                <a:latin typeface="微软雅黑" charset="0"/>
+                <a:ea typeface="微软雅黑" charset="0"/>
+                <a:cs typeface="微软雅黑" charset="0"/>
+              </a:rPr>
+              <a:t>Top-K</a:t>
+            </a:r>
+            <a:r>
+              <a:rPr lang="zh-CN" altLang="en-US" sz="1200" b="1">
+                <a:latin typeface="微软雅黑" charset="0"/>
+                <a:ea typeface="微软雅黑" charset="0"/>
+                <a:cs typeface="微软雅黑" charset="0"/>
+              </a:rPr>
+              <a:t>替换</a:t>
+            </a:r>
+            <a:endParaRPr lang="zh-CN" altLang="en-US" sz="1200" b="1">
+              <a:latin typeface="微软雅黑" charset="0"/>
+              <a:ea typeface="微软雅黑" charset="0"/>
+              <a:cs typeface="微软雅黑" charset="0"/>
+            </a:endParaRPr>
+          </a:p>
+          <a:p>
+            <a:pPr marL="457200" lvl="1" indent="0" algn="l"/>
+            <a:r>
+              <a:rPr lang="zh-CN" altLang="en-US" sz="1200" b="1">
+                <a:latin typeface="微软雅黑" charset="0"/>
+                <a:ea typeface="微软雅黑" charset="0"/>
+                <a:cs typeface="微软雅黑" charset="0"/>
+              </a:rPr>
+              <a:t>如果是</a:t>
+            </a:r>
+            <a:r>
+              <a:rPr lang="zh-CN" altLang="en-US" sz="1200" b="1">
+                <a:latin typeface="微软雅黑" charset="0"/>
+                <a:ea typeface="微软雅黑" charset="0"/>
+                <a:cs typeface="微软雅黑" charset="0"/>
+              </a:rPr>
+              <a:t>分词</a:t>
+            </a:r>
+            <a:endParaRPr lang="zh-CN" altLang="en-US" sz="1200" b="1">
+              <a:latin typeface="微软雅黑" charset="0"/>
+              <a:ea typeface="微软雅黑" charset="0"/>
+              <a:cs typeface="微软雅黑" charset="0"/>
+            </a:endParaRPr>
+          </a:p>
+          <a:p>
+            <a:pPr marL="457200" lvl="1" indent="457200" algn="l"/>
+            <a:r>
+              <a:rPr lang="zh-CN" altLang="en-US" sz="1200" b="1">
+                <a:latin typeface="微软雅黑" charset="0"/>
+                <a:ea typeface="微软雅黑" charset="0"/>
+                <a:cs typeface="微软雅黑" charset="0"/>
+              </a:rPr>
+              <a:t>使用困惑度对组合排序，筛选出合适的组合替换</a:t>
+            </a:r>
+            <a:endParaRPr lang="zh-CN" altLang="en-US" sz="1200" b="1">
+              <a:latin typeface="微软雅黑" charset="0"/>
+              <a:ea typeface="微软雅黑" charset="0"/>
+              <a:cs typeface="微软雅黑" charset="0"/>
+            </a:endParaRPr>
+          </a:p>
+          <a:p>
+            <a:pPr marL="0" lvl="0" indent="0" algn="l"/>
+            <a:r>
+              <a:rPr lang="en-US" altLang="zh-CN" sz="1200" b="1">
+                <a:latin typeface="微软雅黑" charset="0"/>
+                <a:ea typeface="微软雅黑" charset="0"/>
+                <a:cs typeface="微软雅黑" charset="0"/>
+              </a:rPr>
+              <a:t>19~25</a:t>
+            </a:r>
+            <a:endParaRPr lang="en-US" altLang="zh-CN" sz="1200" b="1">
+              <a:latin typeface="微软雅黑" charset="0"/>
+              <a:ea typeface="微软雅黑" charset="0"/>
+              <a:cs typeface="微软雅黑" charset="0"/>
+            </a:endParaRPr>
+          </a:p>
+          <a:p>
+            <a:pPr marL="0" lvl="0" indent="457200" algn="l"/>
+            <a:r>
+              <a:rPr lang="zh-CN" altLang="en-US" sz="1200" b="1">
+                <a:latin typeface="微软雅黑" charset="0"/>
+                <a:ea typeface="微软雅黑" charset="0"/>
+                <a:cs typeface="微软雅黑" charset="0"/>
+              </a:rPr>
+              <a:t>对每个候选词，构造替换后的句子</a:t>
+            </a:r>
+            <a:r>
+              <a:rPr lang="en-US" altLang="zh-CN" sz="1200" b="1">
+                <a:latin typeface="微软雅黑" charset="0"/>
+                <a:ea typeface="微软雅黑" charset="0"/>
+                <a:cs typeface="微软雅黑" charset="0"/>
+              </a:rPr>
+              <a:t>S</a:t>
+            </a:r>
+            <a:r>
+              <a:rPr lang="zh-CN" altLang="en-US" sz="1200" b="1">
+                <a:latin typeface="微软雅黑" charset="0"/>
+                <a:ea typeface="微软雅黑" charset="0"/>
+                <a:cs typeface="微软雅黑" charset="0"/>
+              </a:rPr>
+              <a:t>’</a:t>
+            </a:r>
+            <a:endParaRPr lang="zh-CN" altLang="en-US" sz="1200" b="1">
+              <a:latin typeface="微软雅黑" charset="0"/>
+              <a:ea typeface="微软雅黑" charset="0"/>
+              <a:cs typeface="微软雅黑" charset="0"/>
+            </a:endParaRPr>
+          </a:p>
+          <a:p>
+            <a:pPr marL="457200" lvl="1" indent="457200" algn="l"/>
+            <a:r>
+              <a:rPr lang="zh-CN" altLang="en-US" sz="1200" b="1">
+                <a:latin typeface="微软雅黑" charset="0"/>
+                <a:ea typeface="微软雅黑" charset="0"/>
+                <a:cs typeface="微软雅黑" charset="0"/>
+              </a:rPr>
+              <a:t>如果模型判断改变，表示</a:t>
+            </a:r>
+            <a:r>
+              <a:rPr lang="zh-CN" altLang="en-US" sz="1200" b="1">
+                <a:latin typeface="微软雅黑" charset="0"/>
+                <a:ea typeface="微软雅黑" charset="0"/>
+                <a:cs typeface="微软雅黑" charset="0"/>
+              </a:rPr>
+              <a:t>成功</a:t>
+            </a:r>
+            <a:endParaRPr lang="zh-CN" altLang="en-US" sz="1200" b="1">
+              <a:latin typeface="微软雅黑" charset="0"/>
+              <a:ea typeface="微软雅黑" charset="0"/>
+              <a:cs typeface="微软雅黑" charset="0"/>
+            </a:endParaRPr>
+          </a:p>
+          <a:p>
+            <a:pPr marL="457200" lvl="1" indent="457200" algn="l"/>
+            <a:r>
+              <a:rPr lang="zh-CN" altLang="en-US" sz="1200" b="1">
+                <a:latin typeface="微软雅黑" charset="0"/>
+                <a:ea typeface="微软雅黑" charset="0"/>
+                <a:cs typeface="微软雅黑" charset="0"/>
+              </a:rPr>
+              <a:t>如果模型判断未改变，记录让模型信心下降最多的</a:t>
+            </a:r>
+            <a:r>
+              <a:rPr lang="zh-CN" altLang="en-US" sz="1200" b="1">
+                <a:latin typeface="微软雅黑" charset="0"/>
+                <a:ea typeface="微软雅黑" charset="0"/>
+                <a:cs typeface="微软雅黑" charset="0"/>
+              </a:rPr>
+              <a:t>句子</a:t>
+            </a:r>
+            <a:endParaRPr lang="zh-CN" altLang="en-US" sz="1200" b="1">
+              <a:latin typeface="微软雅黑" charset="0"/>
+              <a:ea typeface="微软雅黑" charset="0"/>
+              <a:cs typeface="微软雅黑" charset="0"/>
+            </a:endParaRPr>
+          </a:p>
+          <a:p>
+            <a:pPr algn="l"/>
+            <a:endParaRPr lang="en-US" altLang="zh-CN" sz="1200" b="1">
+              <a:latin typeface="微软雅黑" charset="0"/>
+              <a:ea typeface="微软雅黑" charset="0"/>
+              <a:cs typeface="微软雅黑" charset="0"/>
+            </a:endParaRPr>
+          </a:p>
+        </p:txBody>
+      </p:sp>
+    </p:spTree>
+  </p:cSld>
+  <p:clrMapOvr>
+    <a:masterClrMapping/>
+  </p:clrMapOvr>
+</p:sld>
+</file>
+
+<file path=ppt/tags/tag1.xml><?xml version="1.0" encoding="utf-8"?>
+<p:tagLst xmlns:p="http://schemas.openxmlformats.org/presentationml/2006/main">
+  <p:tag name="KSO_WM_BEAUTIFY_FLAG" val=""/>
+</p:tagLst>
+</file>
+
+<file path=ppt/tags/tag2.xml><?xml version="1.0" encoding="utf-8"?>
+<p:tagLst xmlns:p="http://schemas.openxmlformats.org/presentationml/2006/main">
+  <p:tag name="KSO_WM_BEAUTIFY_FLAG" val=""/>
+</p:tagLst>
+</file>
+
+<file path=ppt/tags/tag3.xml><?xml version="1.0" encoding="utf-8"?>
+<p:tagLst xmlns:p="http://schemas.openxmlformats.org/presentationml/2006/main">
+  <p:tag name="KSO_WM_BEAUTIFY_FLAG" val=""/>
+</p:tagLst>
 </file>
 
 <file path=ppt/theme/theme1.xml><?xml version="1.0" encoding="utf-8"?>
